--- a/docs/apresentacao_rerankers.pptx
+++ b/docs/apresentacao_rerankers.pptx
@@ -3207,7 +3207,7 @@
               </a:defRPr>
             </a:pPr>
             <a:r>
-              <a:t>AVALIAÇÃO DE RE-RANKING NEURAL (TWO-STAGE RAG) — TCC</a:t>
+              <a:t>AVALIAÇÃO DE RE-RANKING NEURAL (TWO-STAGE RAG) — PESQUISA ICT</a:t>
             </a:r>
           </a:p>
         </p:txBody>
@@ -3387,7 +3387,7 @@
               </a:defRPr>
             </a:pPr>
             <a:r>
-              <a:t>AVALIAÇÃO DE RE-RANKING NEURAL (TWO-STAGE RAG) — TCC</a:t>
+              <a:t>AVALIAÇÃO DE RE-RANKING NEURAL (TWO-STAGE RAG) — PESQUISA ICT</a:t>
             </a:r>
           </a:p>
         </p:txBody>
@@ -3590,7 +3590,7 @@
               </a:defRPr>
             </a:pPr>
             <a:r>
-              <a:t>AVALIAÇÃO DE RE-RANKING NEURAL (TWO-STAGE RAG) — TCC</a:t>
+              <a:t>AVALIAÇÃO DE RE-RANKING NEURAL (TWO-STAGE RAG) — PESQUISA ICT</a:t>
             </a:r>
           </a:p>
         </p:txBody>
@@ -3794,7 +3794,7 @@
               </a:defRPr>
             </a:pPr>
             <a:r>
-              <a:t>AVALIAÇÃO DE RE-RANKING NEURAL (TWO-STAGE RAG) — TCC</a:t>
+              <a:t>AVALIAÇÃO DE RE-RANKING NEURAL (TWO-STAGE RAG) — PESQUISA ICT</a:t>
             </a:r>
           </a:p>
         </p:txBody>
@@ -3975,7 +3975,7 @@
               </a:defRPr>
             </a:pPr>
             <a:r>
-              <a:t>AVALIAÇÃO DE RE-RANKING NEURAL (TWO-STAGE RAG) — TCC</a:t>
+              <a:t>AVALIAÇÃO DE RE-RANKING NEURAL (TWO-STAGE RAG) — PESQUISA ICT</a:t>
             </a:r>
           </a:p>
         </p:txBody>
@@ -4179,7 +4179,7 @@
               </a:defRPr>
             </a:pPr>
             <a:r>
-              <a:t>AVALIAÇÃO DE RE-RANKING NEURAL (TWO-STAGE RAG) — TCC</a:t>
+              <a:t>AVALIAÇÃO DE RE-RANKING NEURAL (TWO-STAGE RAG) — PESQUISA ICT</a:t>
             </a:r>
           </a:p>
         </p:txBody>

--- a/docs/apresentacao_rerankers.pptx
+++ b/docs/apresentacao_rerankers.pptx
@@ -3153,6 +3153,10 @@
                 </a:solidFill>
               </a:defRPr>
             </a:pPr>
+            <a:r>
+              <a:t>Autor: João Messias Lima Pereira  |  Projeto de Pesquisa Científica e Tecnológica (ICT)</a:t>
+            </a:r>
+            <a:br/>
             <a:r>
               <a:t>Hardware: NVIDIA RTX PRO 1000 (8 GB GDDR6) | Estudo de Caso: 16 Manuais CM Comandos Lineares</a:t>
             </a:r>
